--- a/Live-lecture-slides/CITS5503CloudComputingIntro_week1.pptx
+++ b/Live-lecture-slides/CITS5503CloudComputingIntro_week1.pptx
@@ -9175,7 +9175,7 @@
                   <a:schemeClr val="bg2"/>
                 </a:solidFill>
               </a:rPr>
-              <a:t>CITS5503 Cloud Computing 2025 Introduction</a:t>
+              <a:t>CITS5503 Cloud Computing 2026 Introduction</a:t>
             </a:r>
           </a:p>
         </p:txBody>
@@ -14825,7 +14825,7 @@
           </a:ln>
           <a:extLst>
             <a:ext uri="{C572A759-6A51-4108-AA02-DFA0A04FC94B}">
-              <ma14:wrappingTextBoxFlag xmlns:ma14="http://schemas.microsoft.com/office/mac/drawingml/2011/main" xmlns:a14="http://schemas.microsoft.com/office/drawing/2010/main" xmlns:m="http://schemas.openxmlformats.org/officeDocument/2006/math" xmlns="" val="1"/>
+              <ma14:wrappingTextBoxFlag xmlns="" xmlns:m="http://schemas.openxmlformats.org/officeDocument/2006/math" xmlns:a14="http://schemas.microsoft.com/office/drawing/2010/main" xmlns:ma14="http://schemas.microsoft.com/office/mac/drawingml/2011/main" val="1"/>
             </a:ext>
           </a:extLst>
         </p:spPr>
@@ -15394,7 +15394,7 @@
           </a:ln>
           <a:extLst>
             <a:ext uri="{C572A759-6A51-4108-AA02-DFA0A04FC94B}">
-              <ma14:wrappingTextBoxFlag xmlns:ma14="http://schemas.microsoft.com/office/mac/drawingml/2011/main" xmlns:a14="http://schemas.microsoft.com/office/drawing/2010/main" xmlns:m="http://schemas.openxmlformats.org/officeDocument/2006/math" xmlns="" val="1"/>
+              <ma14:wrappingTextBoxFlag xmlns="" xmlns:m="http://schemas.openxmlformats.org/officeDocument/2006/math" xmlns:a14="http://schemas.microsoft.com/office/drawing/2010/main" xmlns:ma14="http://schemas.microsoft.com/office/mac/drawingml/2011/main" val="1"/>
             </a:ext>
           </a:extLst>
         </p:spPr>
@@ -15724,7 +15724,7 @@
           </a:ln>
           <a:extLst>
             <a:ext uri="{C572A759-6A51-4108-AA02-DFA0A04FC94B}">
-              <ma14:wrappingTextBoxFlag xmlns:ma14="http://schemas.microsoft.com/office/mac/drawingml/2011/main" xmlns:a14="http://schemas.microsoft.com/office/drawing/2010/main" xmlns:m="http://schemas.openxmlformats.org/officeDocument/2006/math" xmlns="" val="1"/>
+              <ma14:wrappingTextBoxFlag xmlns="" xmlns:m="http://schemas.openxmlformats.org/officeDocument/2006/math" xmlns:a14="http://schemas.microsoft.com/office/drawing/2010/main" xmlns:ma14="http://schemas.microsoft.com/office/mac/drawingml/2011/main" val="1"/>
             </a:ext>
           </a:extLst>
         </p:spPr>
@@ -16068,7 +16068,7 @@
           </a:ln>
           <a:extLst>
             <a:ext uri="{C572A759-6A51-4108-AA02-DFA0A04FC94B}">
-              <ma14:wrappingTextBoxFlag xmlns:ma14="http://schemas.microsoft.com/office/mac/drawingml/2011/main" xmlns:a14="http://schemas.microsoft.com/office/drawing/2010/main" xmlns:m="http://schemas.openxmlformats.org/officeDocument/2006/math" xmlns="" val="1"/>
+              <ma14:wrappingTextBoxFlag xmlns="" xmlns:m="http://schemas.openxmlformats.org/officeDocument/2006/math" xmlns:a14="http://schemas.microsoft.com/office/drawing/2010/main" xmlns:ma14="http://schemas.microsoft.com/office/mac/drawingml/2011/main" val="1"/>
             </a:ext>
           </a:extLst>
         </p:spPr>
@@ -16423,7 +16423,7 @@
           </a:ln>
           <a:extLst>
             <a:ext uri="{C572A759-6A51-4108-AA02-DFA0A04FC94B}">
-              <ma14:wrappingTextBoxFlag xmlns:ma14="http://schemas.microsoft.com/office/mac/drawingml/2011/main" xmlns:a14="http://schemas.microsoft.com/office/drawing/2010/main" xmlns:m="http://schemas.openxmlformats.org/officeDocument/2006/math" xmlns="" val="1"/>
+              <ma14:wrappingTextBoxFlag xmlns="" xmlns:m="http://schemas.openxmlformats.org/officeDocument/2006/math" xmlns:a14="http://schemas.microsoft.com/office/drawing/2010/main" xmlns:ma14="http://schemas.microsoft.com/office/mac/drawingml/2011/main" val="1"/>
             </a:ext>
           </a:extLst>
         </p:spPr>
@@ -16786,7 +16786,7 @@
           </a:ln>
           <a:extLst>
             <a:ext uri="{C572A759-6A51-4108-AA02-DFA0A04FC94B}">
-              <ma14:wrappingTextBoxFlag xmlns:ma14="http://schemas.microsoft.com/office/mac/drawingml/2011/main" xmlns:a14="http://schemas.microsoft.com/office/drawing/2010/main" xmlns:m="http://schemas.openxmlformats.org/officeDocument/2006/math" xmlns="" val="1"/>
+              <ma14:wrappingTextBoxFlag xmlns="" xmlns:m="http://schemas.openxmlformats.org/officeDocument/2006/math" xmlns:a14="http://schemas.microsoft.com/office/drawing/2010/main" xmlns:ma14="http://schemas.microsoft.com/office/mac/drawingml/2011/main" val="1"/>
             </a:ext>
           </a:extLst>
         </p:spPr>
@@ -16834,7 +16834,7 @@
           </a:ln>
           <a:extLst>
             <a:ext uri="{C572A759-6A51-4108-AA02-DFA0A04FC94B}">
-              <ma14:wrappingTextBoxFlag xmlns:ma14="http://schemas.microsoft.com/office/mac/drawingml/2011/main" xmlns:a14="http://schemas.microsoft.com/office/drawing/2010/main" xmlns:m="http://schemas.openxmlformats.org/officeDocument/2006/math" xmlns="" val="1"/>
+              <ma14:wrappingTextBoxFlag xmlns="" xmlns:m="http://schemas.openxmlformats.org/officeDocument/2006/math" xmlns:a14="http://schemas.microsoft.com/office/drawing/2010/main" xmlns:ma14="http://schemas.microsoft.com/office/mac/drawingml/2011/main" val="1"/>
             </a:ext>
           </a:extLst>
         </p:spPr>
@@ -16882,7 +16882,7 @@
           </a:ln>
           <a:extLst>
             <a:ext uri="{C572A759-6A51-4108-AA02-DFA0A04FC94B}">
-              <ma14:wrappingTextBoxFlag xmlns:ma14="http://schemas.microsoft.com/office/mac/drawingml/2011/main" xmlns:a14="http://schemas.microsoft.com/office/drawing/2010/main" xmlns:m="http://schemas.openxmlformats.org/officeDocument/2006/math" xmlns="" val="1"/>
+              <ma14:wrappingTextBoxFlag xmlns="" xmlns:m="http://schemas.openxmlformats.org/officeDocument/2006/math" xmlns:a14="http://schemas.microsoft.com/office/drawing/2010/main" xmlns:ma14="http://schemas.microsoft.com/office/mac/drawingml/2011/main" val="1"/>
             </a:ext>
           </a:extLst>
         </p:spPr>
@@ -17354,7 +17354,7 @@
           </a:ln>
           <a:extLst>
             <a:ext uri="{C572A759-6A51-4108-AA02-DFA0A04FC94B}">
-              <ma14:wrappingTextBoxFlag xmlns:ma14="http://schemas.microsoft.com/office/mac/drawingml/2011/main" xmlns:a14="http://schemas.microsoft.com/office/drawing/2010/main" xmlns:m="http://schemas.openxmlformats.org/officeDocument/2006/math" xmlns="" val="1"/>
+              <ma14:wrappingTextBoxFlag xmlns="" xmlns:m="http://schemas.openxmlformats.org/officeDocument/2006/math" xmlns:a14="http://schemas.microsoft.com/office/drawing/2010/main" xmlns:ma14="http://schemas.microsoft.com/office/mac/drawingml/2011/main" val="1"/>
             </a:ext>
           </a:extLst>
         </p:spPr>
@@ -17420,7 +17420,7 @@
           </a:ln>
           <a:extLst>
             <a:ext uri="{C572A759-6A51-4108-AA02-DFA0A04FC94B}">
-              <ma14:wrappingTextBoxFlag xmlns:ma14="http://schemas.microsoft.com/office/mac/drawingml/2011/main" xmlns:a14="http://schemas.microsoft.com/office/drawing/2010/main" xmlns:m="http://schemas.openxmlformats.org/officeDocument/2006/math" xmlns="" val="1"/>
+              <ma14:wrappingTextBoxFlag xmlns="" xmlns:m="http://schemas.openxmlformats.org/officeDocument/2006/math" xmlns:a14="http://schemas.microsoft.com/office/drawing/2010/main" xmlns:ma14="http://schemas.microsoft.com/office/mac/drawingml/2011/main" val="1"/>
             </a:ext>
           </a:extLst>
         </p:spPr>
@@ -17500,7 +17500,7 @@
           </a:ln>
           <a:extLst>
             <a:ext uri="{C572A759-6A51-4108-AA02-DFA0A04FC94B}">
-              <ma14:wrappingTextBoxFlag xmlns:ma14="http://schemas.microsoft.com/office/mac/drawingml/2011/main" xmlns:a14="http://schemas.microsoft.com/office/drawing/2010/main" xmlns:m="http://schemas.openxmlformats.org/officeDocument/2006/math" xmlns="" val="1"/>
+              <ma14:wrappingTextBoxFlag xmlns="" xmlns:m="http://schemas.openxmlformats.org/officeDocument/2006/math" xmlns:a14="http://schemas.microsoft.com/office/drawing/2010/main" xmlns:ma14="http://schemas.microsoft.com/office/mac/drawingml/2011/main" val="1"/>
             </a:ext>
           </a:extLst>
         </p:spPr>
@@ -17585,7 +17585,7 @@
           </a:ln>
           <a:extLst>
             <a:ext uri="{C572A759-6A51-4108-AA02-DFA0A04FC94B}">
-              <ma14:wrappingTextBoxFlag xmlns:ma14="http://schemas.microsoft.com/office/mac/drawingml/2011/main" xmlns:a14="http://schemas.microsoft.com/office/drawing/2010/main" xmlns:m="http://schemas.openxmlformats.org/officeDocument/2006/math" xmlns="" val="1"/>
+              <ma14:wrappingTextBoxFlag xmlns="" xmlns:m="http://schemas.openxmlformats.org/officeDocument/2006/math" xmlns:a14="http://schemas.microsoft.com/office/drawing/2010/main" xmlns:ma14="http://schemas.microsoft.com/office/mac/drawingml/2011/main" val="1"/>
             </a:ext>
           </a:extLst>
         </p:spPr>
@@ -18073,7 +18073,7 @@
           </a:ln>
           <a:extLst>
             <a:ext uri="{C572A759-6A51-4108-AA02-DFA0A04FC94B}">
-              <ma14:wrappingTextBoxFlag xmlns:ma14="http://schemas.microsoft.com/office/mac/drawingml/2011/main" xmlns:a14="http://schemas.microsoft.com/office/drawing/2010/main" xmlns:m="http://schemas.openxmlformats.org/officeDocument/2006/math" xmlns="" val="1"/>
+              <ma14:wrappingTextBoxFlag xmlns="" xmlns:m="http://schemas.openxmlformats.org/officeDocument/2006/math" xmlns:a14="http://schemas.microsoft.com/office/drawing/2010/main" xmlns:ma14="http://schemas.microsoft.com/office/mac/drawingml/2011/main" val="1"/>
             </a:ext>
           </a:extLst>
         </p:spPr>
@@ -18121,7 +18121,7 @@
           </a:ln>
           <a:extLst>
             <a:ext uri="{C572A759-6A51-4108-AA02-DFA0A04FC94B}">
-              <ma14:wrappingTextBoxFlag xmlns:ma14="http://schemas.microsoft.com/office/mac/drawingml/2011/main" xmlns:a14="http://schemas.microsoft.com/office/drawing/2010/main" xmlns:m="http://schemas.openxmlformats.org/officeDocument/2006/math" xmlns="" val="1"/>
+              <ma14:wrappingTextBoxFlag xmlns="" xmlns:m="http://schemas.openxmlformats.org/officeDocument/2006/math" xmlns:a14="http://schemas.microsoft.com/office/drawing/2010/main" xmlns:ma14="http://schemas.microsoft.com/office/mac/drawingml/2011/main" val="1"/>
             </a:ext>
           </a:extLst>
         </p:spPr>
@@ -18169,7 +18169,7 @@
           </a:ln>
           <a:extLst>
             <a:ext uri="{C572A759-6A51-4108-AA02-DFA0A04FC94B}">
-              <ma14:wrappingTextBoxFlag xmlns:ma14="http://schemas.microsoft.com/office/mac/drawingml/2011/main" xmlns:a14="http://schemas.microsoft.com/office/drawing/2010/main" xmlns:m="http://schemas.openxmlformats.org/officeDocument/2006/math" xmlns="" val="1"/>
+              <ma14:wrappingTextBoxFlag xmlns="" xmlns:m="http://schemas.openxmlformats.org/officeDocument/2006/math" xmlns:a14="http://schemas.microsoft.com/office/drawing/2010/main" xmlns:ma14="http://schemas.microsoft.com/office/mac/drawingml/2011/main" val="1"/>
             </a:ext>
           </a:extLst>
         </p:spPr>
@@ -18217,7 +18217,7 @@
           </a:ln>
           <a:extLst>
             <a:ext uri="{C572A759-6A51-4108-AA02-DFA0A04FC94B}">
-              <ma14:wrappingTextBoxFlag xmlns:ma14="http://schemas.microsoft.com/office/mac/drawingml/2011/main" xmlns:a14="http://schemas.microsoft.com/office/drawing/2010/main" xmlns:m="http://schemas.openxmlformats.org/officeDocument/2006/math" xmlns="" val="1"/>
+              <ma14:wrappingTextBoxFlag xmlns="" xmlns:m="http://schemas.openxmlformats.org/officeDocument/2006/math" xmlns:a14="http://schemas.microsoft.com/office/drawing/2010/main" xmlns:ma14="http://schemas.microsoft.com/office/mac/drawingml/2011/main" val="1"/>
             </a:ext>
           </a:extLst>
         </p:spPr>
@@ -18577,7 +18577,7 @@
           </a:ln>
           <a:extLst>
             <a:ext uri="{C572A759-6A51-4108-AA02-DFA0A04FC94B}">
-              <ma14:wrappingTextBoxFlag xmlns:ma14="http://schemas.microsoft.com/office/mac/drawingml/2011/main" xmlns:a14="http://schemas.microsoft.com/office/drawing/2010/main" xmlns:m="http://schemas.openxmlformats.org/officeDocument/2006/math" xmlns="" val="1"/>
+              <ma14:wrappingTextBoxFlag xmlns="" xmlns:m="http://schemas.openxmlformats.org/officeDocument/2006/math" xmlns:a14="http://schemas.microsoft.com/office/drawing/2010/main" xmlns:ma14="http://schemas.microsoft.com/office/mac/drawingml/2011/main" val="1"/>
             </a:ext>
           </a:extLst>
         </p:spPr>
@@ -18652,7 +18652,7 @@
           </a:ln>
           <a:extLst>
             <a:ext uri="{C572A759-6A51-4108-AA02-DFA0A04FC94B}">
-              <ma14:wrappingTextBoxFlag xmlns:ma14="http://schemas.microsoft.com/office/mac/drawingml/2011/main" xmlns:a14="http://schemas.microsoft.com/office/drawing/2010/main" xmlns:m="http://schemas.openxmlformats.org/officeDocument/2006/math" xmlns="" val="1"/>
+              <ma14:wrappingTextBoxFlag xmlns="" xmlns:m="http://schemas.openxmlformats.org/officeDocument/2006/math" xmlns:a14="http://schemas.microsoft.com/office/drawing/2010/main" xmlns:ma14="http://schemas.microsoft.com/office/mac/drawingml/2011/main" val="1"/>
             </a:ext>
           </a:extLst>
         </p:spPr>
@@ -18706,7 +18706,7 @@
           </a:ln>
           <a:extLst>
             <a:ext uri="{C572A759-6A51-4108-AA02-DFA0A04FC94B}">
-              <ma14:wrappingTextBoxFlag xmlns:ma14="http://schemas.microsoft.com/office/mac/drawingml/2011/main" xmlns:a14="http://schemas.microsoft.com/office/drawing/2010/main" xmlns:m="http://schemas.openxmlformats.org/officeDocument/2006/math" xmlns="" val="1"/>
+              <ma14:wrappingTextBoxFlag xmlns="" xmlns:m="http://schemas.openxmlformats.org/officeDocument/2006/math" xmlns:a14="http://schemas.microsoft.com/office/drawing/2010/main" xmlns:ma14="http://schemas.microsoft.com/office/mac/drawingml/2011/main" val="1"/>
             </a:ext>
           </a:extLst>
         </p:spPr>
@@ -19056,7 +19056,7 @@
           </a:ln>
           <a:extLst>
             <a:ext uri="{C572A759-6A51-4108-AA02-DFA0A04FC94B}">
-              <ma14:wrappingTextBoxFlag xmlns:ma14="http://schemas.microsoft.com/office/mac/drawingml/2011/main" xmlns:a14="http://schemas.microsoft.com/office/drawing/2010/main" xmlns:m="http://schemas.openxmlformats.org/officeDocument/2006/math" xmlns="" val="1"/>
+              <ma14:wrappingTextBoxFlag xmlns="" xmlns:m="http://schemas.openxmlformats.org/officeDocument/2006/math" xmlns:a14="http://schemas.microsoft.com/office/drawing/2010/main" xmlns:ma14="http://schemas.microsoft.com/office/mac/drawingml/2011/main" val="1"/>
             </a:ext>
           </a:extLst>
         </p:spPr>
@@ -19159,7 +19159,7 @@
           </a:ln>
           <a:extLst>
             <a:ext uri="{C572A759-6A51-4108-AA02-DFA0A04FC94B}">
-              <ma14:wrappingTextBoxFlag xmlns:ma14="http://schemas.microsoft.com/office/mac/drawingml/2011/main" xmlns:a14="http://schemas.microsoft.com/office/drawing/2010/main" xmlns:m="http://schemas.openxmlformats.org/officeDocument/2006/math" xmlns="" val="1"/>
+              <ma14:wrappingTextBoxFlag xmlns="" xmlns:m="http://schemas.openxmlformats.org/officeDocument/2006/math" xmlns:a14="http://schemas.microsoft.com/office/drawing/2010/main" xmlns:ma14="http://schemas.microsoft.com/office/mac/drawingml/2011/main" val="1"/>
             </a:ext>
           </a:extLst>
         </p:spPr>
@@ -19361,7 +19361,7 @@
           </a:ln>
           <a:extLst>
             <a:ext uri="{C572A759-6A51-4108-AA02-DFA0A04FC94B}">
-              <ma14:wrappingTextBoxFlag xmlns:ma14="http://schemas.microsoft.com/office/mac/drawingml/2011/main" xmlns:a14="http://schemas.microsoft.com/office/drawing/2010/main" xmlns:m="http://schemas.openxmlformats.org/officeDocument/2006/math" xmlns="" val="1"/>
+              <ma14:wrappingTextBoxFlag xmlns="" xmlns:m="http://schemas.openxmlformats.org/officeDocument/2006/math" xmlns:a14="http://schemas.microsoft.com/office/drawing/2010/main" xmlns:ma14="http://schemas.microsoft.com/office/mac/drawingml/2011/main" val="1"/>
             </a:ext>
           </a:extLst>
         </p:spPr>
@@ -19588,7 +19588,7 @@
           </a:ln>
           <a:extLst>
             <a:ext uri="{C572A759-6A51-4108-AA02-DFA0A04FC94B}">
-              <ma14:wrappingTextBoxFlag xmlns:ma14="http://schemas.microsoft.com/office/mac/drawingml/2011/main" xmlns:a14="http://schemas.microsoft.com/office/drawing/2010/main" xmlns:m="http://schemas.openxmlformats.org/officeDocument/2006/math" xmlns="" val="1"/>
+              <ma14:wrappingTextBoxFlag xmlns="" xmlns:m="http://schemas.openxmlformats.org/officeDocument/2006/math" xmlns:a14="http://schemas.microsoft.com/office/drawing/2010/main" xmlns:ma14="http://schemas.microsoft.com/office/mac/drawingml/2011/main" val="1"/>
             </a:ext>
           </a:extLst>
         </p:spPr>
@@ -20073,7 +20073,7 @@
           </a:ln>
           <a:extLst>
             <a:ext uri="{C572A759-6A51-4108-AA02-DFA0A04FC94B}">
-              <ma14:wrappingTextBoxFlag xmlns:ma14="http://schemas.microsoft.com/office/mac/drawingml/2011/main" xmlns:a14="http://schemas.microsoft.com/office/drawing/2010/main" xmlns:m="http://schemas.openxmlformats.org/officeDocument/2006/math" xmlns="" val="1"/>
+              <ma14:wrappingTextBoxFlag xmlns="" xmlns:m="http://schemas.openxmlformats.org/officeDocument/2006/math" xmlns:a14="http://schemas.microsoft.com/office/drawing/2010/main" xmlns:ma14="http://schemas.microsoft.com/office/mac/drawingml/2011/main" val="1"/>
             </a:ext>
           </a:extLst>
         </p:spPr>
@@ -20121,7 +20121,7 @@
           </a:ln>
           <a:extLst>
             <a:ext uri="{C572A759-6A51-4108-AA02-DFA0A04FC94B}">
-              <ma14:wrappingTextBoxFlag xmlns:ma14="http://schemas.microsoft.com/office/mac/drawingml/2011/main" xmlns:a14="http://schemas.microsoft.com/office/drawing/2010/main" xmlns:m="http://schemas.openxmlformats.org/officeDocument/2006/math" xmlns="" val="1"/>
+              <ma14:wrappingTextBoxFlag xmlns="" xmlns:m="http://schemas.openxmlformats.org/officeDocument/2006/math" xmlns:a14="http://schemas.microsoft.com/office/drawing/2010/main" xmlns:ma14="http://schemas.microsoft.com/office/mac/drawingml/2011/main" val="1"/>
             </a:ext>
           </a:extLst>
         </p:spPr>
@@ -20169,7 +20169,7 @@
           </a:ln>
           <a:extLst>
             <a:ext uri="{C572A759-6A51-4108-AA02-DFA0A04FC94B}">
-              <ma14:wrappingTextBoxFlag xmlns:ma14="http://schemas.microsoft.com/office/mac/drawingml/2011/main" xmlns:a14="http://schemas.microsoft.com/office/drawing/2010/main" xmlns:m="http://schemas.openxmlformats.org/officeDocument/2006/math" xmlns="" val="1"/>
+              <ma14:wrappingTextBoxFlag xmlns="" xmlns:m="http://schemas.openxmlformats.org/officeDocument/2006/math" xmlns:a14="http://schemas.microsoft.com/office/drawing/2010/main" xmlns:ma14="http://schemas.microsoft.com/office/mac/drawingml/2011/main" val="1"/>
             </a:ext>
           </a:extLst>
         </p:spPr>
@@ -20217,7 +20217,7 @@
           </a:ln>
           <a:extLst>
             <a:ext uri="{C572A759-6A51-4108-AA02-DFA0A04FC94B}">
-              <ma14:wrappingTextBoxFlag xmlns:ma14="http://schemas.microsoft.com/office/mac/drawingml/2011/main" xmlns:a14="http://schemas.microsoft.com/office/drawing/2010/main" xmlns:m="http://schemas.openxmlformats.org/officeDocument/2006/math" xmlns="" val="1"/>
+              <ma14:wrappingTextBoxFlag xmlns="" xmlns:m="http://schemas.openxmlformats.org/officeDocument/2006/math" xmlns:a14="http://schemas.microsoft.com/office/drawing/2010/main" xmlns:ma14="http://schemas.microsoft.com/office/mac/drawingml/2011/main" val="1"/>
             </a:ext>
           </a:extLst>
         </p:spPr>
@@ -20265,7 +20265,7 @@
           </a:ln>
           <a:extLst>
             <a:ext uri="{C572A759-6A51-4108-AA02-DFA0A04FC94B}">
-              <ma14:wrappingTextBoxFlag xmlns:ma14="http://schemas.microsoft.com/office/mac/drawingml/2011/main" xmlns:a14="http://schemas.microsoft.com/office/drawing/2010/main" xmlns:m="http://schemas.openxmlformats.org/officeDocument/2006/math" xmlns="" val="1"/>
+              <ma14:wrappingTextBoxFlag xmlns="" xmlns:m="http://schemas.openxmlformats.org/officeDocument/2006/math" xmlns:a14="http://schemas.microsoft.com/office/drawing/2010/main" xmlns:ma14="http://schemas.microsoft.com/office/mac/drawingml/2011/main" val="1"/>
             </a:ext>
           </a:extLst>
         </p:spPr>
@@ -21218,7 +21218,7 @@
           </a:ln>
           <a:extLst>
             <a:ext uri="{C572A759-6A51-4108-AA02-DFA0A04FC94B}">
-              <ma14:wrappingTextBoxFlag xmlns:ma14="http://schemas.microsoft.com/office/mac/drawingml/2011/main" xmlns:a14="http://schemas.microsoft.com/office/drawing/2010/main" xmlns:m="http://schemas.openxmlformats.org/officeDocument/2006/math" xmlns="" val="1"/>
+              <ma14:wrappingTextBoxFlag xmlns="" xmlns:m="http://schemas.openxmlformats.org/officeDocument/2006/math" xmlns:a14="http://schemas.microsoft.com/office/drawing/2010/main" xmlns:ma14="http://schemas.microsoft.com/office/mac/drawingml/2011/main" val="1"/>
             </a:ext>
           </a:extLst>
         </p:spPr>
@@ -21520,7 +21520,7 @@
           </a:ln>
           <a:extLst>
             <a:ext uri="{C572A759-6A51-4108-AA02-DFA0A04FC94B}">
-              <ma14:wrappingTextBoxFlag xmlns:ma14="http://schemas.microsoft.com/office/mac/drawingml/2011/main" xmlns:a14="http://schemas.microsoft.com/office/drawing/2010/main" xmlns:m="http://schemas.openxmlformats.org/officeDocument/2006/math" xmlns="" val="1"/>
+              <ma14:wrappingTextBoxFlag xmlns="" xmlns:m="http://schemas.openxmlformats.org/officeDocument/2006/math" xmlns:a14="http://schemas.microsoft.com/office/drawing/2010/main" xmlns:ma14="http://schemas.microsoft.com/office/mac/drawingml/2011/main" val="1"/>
             </a:ext>
           </a:extLst>
         </p:spPr>
@@ -23102,7 +23102,7 @@
           </a:ln>
           <a:extLst>
             <a:ext uri="{C572A759-6A51-4108-AA02-DFA0A04FC94B}">
-              <ma14:wrappingTextBoxFlag xmlns:ma14="http://schemas.microsoft.com/office/mac/drawingml/2011/main" xmlns:a14="http://schemas.microsoft.com/office/drawing/2010/main" xmlns:m="http://schemas.openxmlformats.org/officeDocument/2006/math" xmlns="" val="1"/>
+              <ma14:wrappingTextBoxFlag xmlns="" xmlns:m="http://schemas.openxmlformats.org/officeDocument/2006/math" xmlns:a14="http://schemas.microsoft.com/office/drawing/2010/main" xmlns:ma14="http://schemas.microsoft.com/office/mac/drawingml/2011/main" val="1"/>
             </a:ext>
           </a:extLst>
         </p:spPr>

--- a/Live-lecture-slides/CITS5503CloudComputingIntro_week1.pptx
+++ b/Live-lecture-slides/CITS5503CloudComputingIntro_week1.pptx
@@ -1,6 +1,6 @@
 
 <file path=ppt/presentation.xml><?xml version="1.0" encoding="utf-8"?>
-<p:presentation xmlns:a="http://schemas.openxmlformats.org/drawingml/2006/main" xmlns:r="http://schemas.openxmlformats.org/officeDocument/2006/relationships" xmlns:p="http://schemas.openxmlformats.org/presentationml/2006/main" removePersonalInfoOnSave="1" strictFirstAndLastChars="0" saveSubsetFonts="1">
+<p:presentation xmlns:a="http://schemas.openxmlformats.org/drawingml/2006/main" xmlns:r="http://schemas.openxmlformats.org/officeDocument/2006/relationships" xmlns:p="http://schemas.openxmlformats.org/presentationml/2006/main" strictFirstAndLastChars="0" saveSubsetFonts="1">
   <p:sldMasterIdLst>
     <p:sldMasterId id="2147483749" r:id="rId1"/>
   </p:sldMasterIdLst>
@@ -9175,7 +9175,23 @@
                   <a:schemeClr val="bg2"/>
                 </a:solidFill>
               </a:rPr>
-              <a:t>CITS5503 Cloud Computing 2026 Introduction</a:t>
+              <a:t>CITS5503 Cloud </a:t>
+            </a:r>
+            <a:r>
+              <a:rPr lang="en-US" sz="3500">
+                <a:solidFill>
+                  <a:schemeClr val="bg2"/>
+                </a:solidFill>
+              </a:rPr>
+              <a:t>Computing 2026 </a:t>
+            </a:r>
+            <a:r>
+              <a:rPr lang="en-US" sz="3500" dirty="0">
+                <a:solidFill>
+                  <a:schemeClr val="bg2"/>
+                </a:solidFill>
+              </a:rPr>
+              <a:t>Introduction</a:t>
             </a:r>
           </a:p>
         </p:txBody>
